--- a/SIM-Tema-5/Actividad 5.1 Proyecto integrador_CynthiaMorales_SIM_7ISCM.pptx
+++ b/SIM-Tema-5/Actividad 5.1 Proyecto integrador_CynthiaMorales_SIM_7ISCM.pptx
@@ -5,7 +5,7 @@
     <p:sldMasterId id="2147483648" r:id="rId1"/>
   </p:sldMasterIdLst>
   <p:notesMasterIdLst>
-    <p:notesMasterId r:id="rId14"/>
+    <p:notesMasterId r:id="rId15"/>
   </p:notesMasterIdLst>
   <p:sldIdLst>
     <p:sldId id="267" r:id="rId2"/>
@@ -20,6 +20,7 @@
     <p:sldId id="264" r:id="rId11"/>
     <p:sldId id="265" r:id="rId12"/>
     <p:sldId id="266" r:id="rId13"/>
+    <p:sldId id="268" r:id="rId14"/>
   </p:sldIdLst>
   <p:sldSz cx="9144000" cy="5143500" type="screen16x9"/>
   <p:notesSz cx="5143500" cy="9144000"/>
@@ -3264,6 +3265,186 @@
         </p:txBody>
       </p:sp>
     </p:spTree>
+  </p:cSld>
+  <p:clrMapOvr>
+    <a:masterClrMapping/>
+  </p:clrMapOvr>
+</p:sld>
+</file>
+
+<file path=ppt/slides/slide13.xml><?xml version="1.0" encoding="utf-8"?>
+<p:sld xmlns:a="http://schemas.openxmlformats.org/drawingml/2006/main" xmlns:r="http://schemas.openxmlformats.org/officeDocument/2006/relationships" xmlns:p="http://schemas.openxmlformats.org/presentationml/2006/main">
+  <p:cSld>
+    <p:spTree>
+      <p:nvGrpSpPr>
+        <p:cNvPr id="1" name=""/>
+        <p:cNvGrpSpPr/>
+        <p:nvPr/>
+      </p:nvGrpSpPr>
+      <p:grpSpPr>
+        <a:xfrm>
+          <a:off x="0" y="0"/>
+          <a:ext cx="0" cy="0"/>
+          <a:chOff x="0" y="0"/>
+          <a:chExt cx="0" cy="0"/>
+        </a:xfrm>
+      </p:grpSpPr>
+      <p:sp>
+        <p:nvSpPr>
+          <p:cNvPr id="3" name="CuadroTexto 2">
+            <a:hlinkClick r:id="rId2"/>
+            <a:extLst>
+              <a:ext uri="{FF2B5EF4-FFF2-40B4-BE49-F238E27FC236}">
+                <a16:creationId xmlns:a16="http://schemas.microsoft.com/office/drawing/2014/main" id="{20266147-586A-9B96-4445-8EC69444D3C2}"/>
+              </a:ext>
+            </a:extLst>
+          </p:cNvPr>
+          <p:cNvSpPr txBox="1"/>
+          <p:nvPr/>
+        </p:nvSpPr>
+        <p:spPr>
+          <a:xfrm>
+            <a:off x="304800" y="1741646"/>
+            <a:ext cx="8648700" cy="646331"/>
+          </a:xfrm>
+          <a:prstGeom prst="rect">
+            <a:avLst/>
+          </a:prstGeom>
+          <a:noFill/>
+        </p:spPr>
+        <p:txBody>
+          <a:bodyPr wrap="square">
+            <a:spAutoFit/>
+          </a:bodyPr>
+          <a:lstStyle/>
+          <a:p>
+            <a:r>
+              <a:rPr lang="es-MX" dirty="0"/>
+              <a:t>https://github.com/Cynthia21Morales/SIMULACION_CynthiaJasmineMT/blob/main/SIM-Tema-5/Actividad%205.1%20Proyecto%20integrador_CynthiaMorales_SIM_7ISCM.pptx</a:t>
+            </a:r>
+          </a:p>
+        </p:txBody>
+      </p:sp>
+      <p:sp>
+        <p:nvSpPr>
+          <p:cNvPr id="5" name="CuadroTexto 4">
+            <a:hlinkClick r:id="rId2"/>
+            <a:extLst>
+              <a:ext uri="{FF2B5EF4-FFF2-40B4-BE49-F238E27FC236}">
+                <a16:creationId xmlns:a16="http://schemas.microsoft.com/office/drawing/2014/main" id="{CC1472D4-AC0C-2F2E-91B0-DB8E01486F30}"/>
+              </a:ext>
+            </a:extLst>
+          </p:cNvPr>
+          <p:cNvSpPr txBox="1"/>
+          <p:nvPr/>
+        </p:nvSpPr>
+        <p:spPr>
+          <a:xfrm>
+            <a:off x="304800" y="3299281"/>
+            <a:ext cx="6499860" cy="923330"/>
+          </a:xfrm>
+          <a:prstGeom prst="rect">
+            <a:avLst/>
+          </a:prstGeom>
+          <a:noFill/>
+        </p:spPr>
+        <p:txBody>
+          <a:bodyPr wrap="square">
+            <a:spAutoFit/>
+          </a:bodyPr>
+          <a:lstStyle/>
+          <a:p>
+            <a:r>
+              <a:rPr lang="es-MX" dirty="0"/>
+              <a:t>https://github.com/Cynthia21Morales/SIMULACION_CynthiaJasmineMT/tree/main/SIM-Tema-5/Diagramas%20de%20Proceso_Bizagi_Bonita_Camunda</a:t>
+            </a:r>
+          </a:p>
+        </p:txBody>
+      </p:sp>
+      <p:sp>
+        <p:nvSpPr>
+          <p:cNvPr id="6" name="CuadroTexto 5">
+            <a:extLst>
+              <a:ext uri="{FF2B5EF4-FFF2-40B4-BE49-F238E27FC236}">
+                <a16:creationId xmlns:a16="http://schemas.microsoft.com/office/drawing/2014/main" id="{708C1587-2FE3-5FC3-EB52-7413CB503BAD}"/>
+              </a:ext>
+            </a:extLst>
+          </p:cNvPr>
+          <p:cNvSpPr txBox="1"/>
+          <p:nvPr/>
+        </p:nvSpPr>
+        <p:spPr>
+          <a:xfrm>
+            <a:off x="388620" y="631091"/>
+            <a:ext cx="5989320" cy="646331"/>
+          </a:xfrm>
+          <a:prstGeom prst="rect">
+            <a:avLst/>
+          </a:prstGeom>
+          <a:noFill/>
+        </p:spPr>
+        <p:txBody>
+          <a:bodyPr wrap="square" rtlCol="0">
+            <a:spAutoFit/>
+          </a:bodyPr>
+          <a:lstStyle/>
+          <a:p>
+            <a:r>
+              <a:rPr lang="es-MX" dirty="0">
+                <a:solidFill>
+                  <a:schemeClr val="accent1"/>
+                </a:solidFill>
+              </a:rPr>
+              <a:t>ANEXO LINK DE LA ACTIVIDAD SOLICITADA Y ENVIADA A GITHUB:</a:t>
+            </a:r>
+          </a:p>
+        </p:txBody>
+      </p:sp>
+      <p:sp>
+        <p:nvSpPr>
+          <p:cNvPr id="7" name="CuadroTexto 6">
+            <a:extLst>
+              <a:ext uri="{FF2B5EF4-FFF2-40B4-BE49-F238E27FC236}">
+                <a16:creationId xmlns:a16="http://schemas.microsoft.com/office/drawing/2014/main" id="{6901D492-53C4-EFF2-89D5-59D7543EFB43}"/>
+              </a:ext>
+            </a:extLst>
+          </p:cNvPr>
+          <p:cNvSpPr txBox="1"/>
+          <p:nvPr/>
+        </p:nvSpPr>
+        <p:spPr>
+          <a:xfrm>
+            <a:off x="304800" y="2476500"/>
+            <a:ext cx="8153400" cy="646331"/>
+          </a:xfrm>
+          <a:prstGeom prst="rect">
+            <a:avLst/>
+          </a:prstGeom>
+          <a:noFill/>
+        </p:spPr>
+        <p:txBody>
+          <a:bodyPr wrap="square" rtlCol="0">
+            <a:spAutoFit/>
+          </a:bodyPr>
+          <a:lstStyle/>
+          <a:p>
+            <a:r>
+              <a:rPr lang="es-MX" dirty="0">
+                <a:solidFill>
+                  <a:schemeClr val="accent1"/>
+                </a:solidFill>
+              </a:rPr>
+              <a:t>JUNTO A ELLA SE ADJUNTA EL ARCHIVO DONDE SE ENCUENTRAN LOS DIAGRAMAS DE PROCESOS</a:t>
+            </a:r>
+          </a:p>
+        </p:txBody>
+      </p:sp>
+    </p:spTree>
+    <p:extLst>
+      <p:ext uri="{BB962C8B-B14F-4D97-AF65-F5344CB8AC3E}">
+        <p14:creationId xmlns:p14="http://schemas.microsoft.com/office/powerpoint/2010/main" val="2392562005"/>
+      </p:ext>
+    </p:extLst>
   </p:cSld>
   <p:clrMapOvr>
     <a:masterClrMapping/>
